--- a/dsst289-f25/pslides/02_grammar_of_graphics.pptx
+++ b/dsst289-f25/pslides/02_grammar_of_graphics.pptx
@@ -203,7 +203,7 @@
           <a:p>
             <a:fld id="{157A7279-E60E-0F4B-A492-5BF69316071C}" type="datetimeFigureOut">
               <a:rPr lang="fr-FR" smtClean="0"/>
-              <a:t>31/08/2025</a:t>
+              <a:t>01/09/2025</a:t>
             </a:fld>
             <a:endParaRPr lang="fr-FR"/>
           </a:p>
@@ -701,7 +701,7 @@
           <a:p>
             <a:fld id="{7B9169B0-A344-9A43-AAD5-682508993835}" type="datetimeFigureOut">
               <a:rPr lang="fr-FR" smtClean="0"/>
-              <a:t>31/08/2025</a:t>
+              <a:t>01/09/2025</a:t>
             </a:fld>
             <a:endParaRPr lang="fr-FR"/>
           </a:p>
@@ -899,7 +899,7 @@
           <a:p>
             <a:fld id="{7B9169B0-A344-9A43-AAD5-682508993835}" type="datetimeFigureOut">
               <a:rPr lang="fr-FR" smtClean="0"/>
-              <a:t>31/08/2025</a:t>
+              <a:t>01/09/2025</a:t>
             </a:fld>
             <a:endParaRPr lang="fr-FR"/>
           </a:p>
@@ -1107,7 +1107,7 @@
           <a:p>
             <a:fld id="{7B9169B0-A344-9A43-AAD5-682508993835}" type="datetimeFigureOut">
               <a:rPr lang="fr-FR" smtClean="0"/>
-              <a:t>31/08/2025</a:t>
+              <a:t>01/09/2025</a:t>
             </a:fld>
             <a:endParaRPr lang="fr-FR"/>
           </a:p>
@@ -1305,7 +1305,7 @@
           <a:p>
             <a:fld id="{7B9169B0-A344-9A43-AAD5-682508993835}" type="datetimeFigureOut">
               <a:rPr lang="fr-FR" smtClean="0"/>
-              <a:t>31/08/2025</a:t>
+              <a:t>01/09/2025</a:t>
             </a:fld>
             <a:endParaRPr lang="fr-FR"/>
           </a:p>
@@ -1580,7 +1580,7 @@
           <a:p>
             <a:fld id="{7B9169B0-A344-9A43-AAD5-682508993835}" type="datetimeFigureOut">
               <a:rPr lang="fr-FR" smtClean="0"/>
-              <a:t>31/08/2025</a:t>
+              <a:t>01/09/2025</a:t>
             </a:fld>
             <a:endParaRPr lang="fr-FR"/>
           </a:p>
@@ -1845,7 +1845,7 @@
           <a:p>
             <a:fld id="{7B9169B0-A344-9A43-AAD5-682508993835}" type="datetimeFigureOut">
               <a:rPr lang="fr-FR" smtClean="0"/>
-              <a:t>31/08/2025</a:t>
+              <a:t>01/09/2025</a:t>
             </a:fld>
             <a:endParaRPr lang="fr-FR"/>
           </a:p>
@@ -2257,7 +2257,7 @@
           <a:p>
             <a:fld id="{7B9169B0-A344-9A43-AAD5-682508993835}" type="datetimeFigureOut">
               <a:rPr lang="fr-FR" smtClean="0"/>
-              <a:t>31/08/2025</a:t>
+              <a:t>01/09/2025</a:t>
             </a:fld>
             <a:endParaRPr lang="fr-FR"/>
           </a:p>
@@ -2398,7 +2398,7 @@
           <a:p>
             <a:fld id="{7B9169B0-A344-9A43-AAD5-682508993835}" type="datetimeFigureOut">
               <a:rPr lang="fr-FR" smtClean="0"/>
-              <a:t>31/08/2025</a:t>
+              <a:t>01/09/2025</a:t>
             </a:fld>
             <a:endParaRPr lang="fr-FR"/>
           </a:p>
@@ -2511,7 +2511,7 @@
           <a:p>
             <a:fld id="{7B9169B0-A344-9A43-AAD5-682508993835}" type="datetimeFigureOut">
               <a:rPr lang="fr-FR" smtClean="0"/>
-              <a:t>31/08/2025</a:t>
+              <a:t>01/09/2025</a:t>
             </a:fld>
             <a:endParaRPr lang="fr-FR"/>
           </a:p>
@@ -2822,7 +2822,7 @@
           <a:p>
             <a:fld id="{7B9169B0-A344-9A43-AAD5-682508993835}" type="datetimeFigureOut">
               <a:rPr lang="fr-FR" smtClean="0"/>
-              <a:t>31/08/2025</a:t>
+              <a:t>01/09/2025</a:t>
             </a:fld>
             <a:endParaRPr lang="fr-FR"/>
           </a:p>
@@ -3110,7 +3110,7 @@
           <a:p>
             <a:fld id="{7B9169B0-A344-9A43-AAD5-682508993835}" type="datetimeFigureOut">
               <a:rPr lang="fr-FR" smtClean="0"/>
-              <a:t>31/08/2025</a:t>
+              <a:t>01/09/2025</a:t>
             </a:fld>
             <a:endParaRPr lang="fr-FR"/>
           </a:p>
@@ -3351,7 +3351,7 @@
           <a:p>
             <a:fld id="{7B9169B0-A344-9A43-AAD5-682508993835}" type="datetimeFigureOut">
               <a:rPr lang="fr-FR" smtClean="0"/>
-              <a:t>31/08/2025</a:t>
+              <a:t>01/09/2025</a:t>
             </a:fld>
             <a:endParaRPr lang="fr-FR"/>
           </a:p>
@@ -5728,7 +5728,7 @@
                   </a:schemeClr>
                 </a:solidFill>
               </a:rPr>
-              <a:t>    geom_point(aes(x = calories, y = total_fat)))</a:t>
+              <a:t>    geom_point(aes(x = "calories", y = "total_fat")))</a:t>
             </a:r>
           </a:p>
         </p:txBody>
@@ -5877,8 +5877,8 @@
         </p:nvSpPr>
         <p:spPr>
           <a:xfrm>
-            <a:off x="4581624" y="4097222"/>
-            <a:ext cx="7483366" cy="830997"/>
+            <a:off x="3989811" y="3901859"/>
+            <a:ext cx="8134121" cy="830997"/>
           </a:xfrm>
           <a:prstGeom prst="rect">
             <a:avLst/>
@@ -5911,7 +5911,7 @@
                   </a:schemeClr>
                 </a:solidFill>
               </a:rPr>
-              <a:t>    geom_text(aes(x = calories, y = total_fat, label = item)))</a:t>
+              <a:t>    geom_text(aes(x = "calories", y = "total_fat", label = "item")))</a:t>
             </a:r>
           </a:p>
         </p:txBody>
